--- a/data/employees/EMP062/AST-EMP062-01.pptx
+++ b/data/employees/EMP062/AST-EMP062-01.pptx
@@ -9,6 +9,7 @@
     <p:sldId id="257" r:id="rId8"/>
     <p:sldId id="258" r:id="rId9"/>
     <p:sldId id="259" r:id="rId10"/>
+    <p:sldId id="260" r:id="rId11"/>
   </p:sldIdLst>
   <p:sldSz cx="9144000" cy="6858000" type="screen4x3"/>
   <p:notesSz cx="6858000" cy="9144000"/>
@@ -3098,42 +3099,55 @@
             <a:spLocks noGrp="1"/>
           </p:cNvSpPr>
           <p:nvPr>
-            <p:ph type="ctrTitle"/>
-          </p:nvPr>
-        </p:nvSpPr>
-        <p:spPr/>
-        <p:txBody>
-          <a:bodyPr/>
-          <a:lstStyle/>
-          <a:p>
-            <a:r>
-              <a:t>Project update deck - EMP062</a:t>
-            </a:r>
-          </a:p>
-        </p:txBody>
-      </p:sp>
-      <p:sp>
-        <p:nvSpPr>
-          <p:cNvPr id="3" name="Subtitle 2"/>
-          <p:cNvSpPr>
-            <a:spLocks noGrp="1"/>
-          </p:cNvSpPr>
-          <p:nvPr>
-            <p:ph type="subTitle" idx="1"/>
-          </p:nvPr>
-        </p:nvSpPr>
-        <p:spPr/>
-        <p:txBody>
-          <a:bodyPr/>
-          <a:lstStyle/>
-          <a:p>
-            <a:r>
-              <a:t>Jordan Nguyen | Specialist | Operations</a:t>
-            </a:r>
-          </a:p>
-          <a:p>
-            <a:r>
-              <a:t>Prepared: 2025-03-05</a:t>
+            <p:ph type="title"/>
+          </p:nvPr>
+        </p:nvSpPr>
+        <p:spPr/>
+        <p:txBody>
+          <a:bodyPr/>
+          <a:lstStyle/>
+          <a:p>
+            <a:r>
+              <a:t>Ast Emp062 01 - EMP062</a:t>
+            </a:r>
+          </a:p>
+        </p:txBody>
+      </p:sp>
+      <p:sp>
+        <p:nvSpPr>
+          <p:cNvPr id="3" name="Content Placeholder 2"/>
+          <p:cNvSpPr>
+            <a:spLocks noGrp="1"/>
+          </p:cNvSpPr>
+          <p:nvPr>
+            <p:ph idx="1"/>
+          </p:nvPr>
+        </p:nvSpPr>
+        <p:spPr/>
+        <p:txBody>
+          <a:bodyPr/>
+          <a:lstStyle/>
+          <a:p>
+            <a:r>
+              <a:t>Slide 1: Executive Summary</a:t>
+            </a:r>
+          </a:p>
+          <a:p>
+            <a:pPr lvl="1"/>
+            <a:r>
+              <a:t>Section 1: Customer escalation analysis. EMP062 contributes to ast emp062 01 through recurring collaboration, clear ownership boundaries, and measurable outcomes. The team captures decisions, open issues, and handoffs so that knowledge remains discoverable for future programs.</a:t>
+            </a:r>
+          </a:p>
+          <a:p>
+            <a:pPr lvl="1"/>
+            <a:r>
+              <a:t>Section 2: Department KPI performance. EMP062 contributes to ast emp062 01 through recurring collaboration, clear ownership boundaries, and measurable outcomes. The team captures decisions, open issues, and handoffs so that knowledge remains discoverable for future programs.</a:t>
+            </a:r>
+          </a:p>
+          <a:p>
+            <a:pPr lvl="1"/>
+            <a:r>
+              <a:t>Section 3: Department KPI performance. EMP062 contributes to ast emp062 01 through recurring collaboration, clear ownership boundaries, and measurable outcomes. The team captures decisions, open issues, and handoffs so that knowledge remains discoverable for future programs.</a:t>
             </a:r>
           </a:p>
         </p:txBody>
@@ -3172,7 +3186,7 @@
           <a:lstStyle/>
           <a:p>
             <a:r>
-              <a:t>Shift Productivity Dashboard</a:t>
+              <a:t>Ast Emp062 01 - EMP062</a:t>
             </a:r>
           </a:p>
         </p:txBody>
@@ -3193,17 +3207,25 @@
           <a:lstStyle/>
           <a:p>
             <a:r>
-              <a:t>Overview of Shift Productivity Dashboard for Operations department.</a:t>
-            </a:r>
-          </a:p>
-          <a:p>
-            <a:r>
-              <a:t>Responsible: Jordan Nguyen (Specialist)</a:t>
-            </a:r>
-          </a:p>
-          <a:p>
-            <a:r>
-              <a:t>Location: Bengaluru | Skills: SQL, Kusto, TypeScript, Power BI</a:t>
+              <a:t>Slide 2: Executive Summary</a:t>
+            </a:r>
+          </a:p>
+          <a:p>
+            <a:pPr lvl="1"/>
+            <a:r>
+              <a:t>Section 1: Customer escalation analysis. EMP062 contributes to ast emp062 01 through recurring collaboration, clear ownership boundaries, and measurable outcomes. The team captures decisions, open issues, and handoffs so that knowledge remains discoverable for future programs.</a:t>
+            </a:r>
+          </a:p>
+          <a:p>
+            <a:pPr lvl="1"/>
+            <a:r>
+              <a:t>Section 2: Quarterly delivery milestones. EMP062 contributes to ast emp062 01 through recurring collaboration, clear ownership boundaries, and measurable outcomes. The team captures decisions, open issues, and handoffs so that knowledge remains discoverable for future programs.</a:t>
+            </a:r>
+          </a:p>
+          <a:p>
+            <a:pPr lvl="1"/>
+            <a:r>
+              <a:t>Section 3: Fabric semantic model planning. EMP062 contributes to ast emp062 01 through recurring collaboration, clear ownership boundaries, and measurable outcomes. The team captures decisions, open issues, and handoffs so that knowledge remains discoverable for future programs.</a:t>
             </a:r>
           </a:p>
         </p:txBody>
@@ -3242,7 +3264,7 @@
           <a:lstStyle/>
           <a:p>
             <a:r>
-              <a:t>Throughput vs. Target</a:t>
+              <a:t>Ast Emp062 01 - EMP062</a:t>
             </a:r>
           </a:p>
         </p:txBody>
@@ -3263,17 +3285,25 @@
           <a:lstStyle/>
           <a:p>
             <a:r>
-              <a:t>Overview of Throughput vs. Target for Operations department.</a:t>
-            </a:r>
-          </a:p>
-          <a:p>
-            <a:r>
-              <a:t>Responsible: Jordan Nguyen (Specialist)</a:t>
-            </a:r>
-          </a:p>
-          <a:p>
-            <a:r>
-              <a:t>Location: Bengaluru | Skills: SQL, Kusto, TypeScript, Power BI</a:t>
+              <a:t>Slide 3: Executive Summary</a:t>
+            </a:r>
+          </a:p>
+          <a:p>
+            <a:pPr lvl="1"/>
+            <a:r>
+              <a:t>Section 1: Operational risk review. EMP062 contributes to ast emp062 01 through recurring collaboration, clear ownership boundaries, and measurable outcomes. The team captures decisions, open issues, and handoffs so that knowledge remains discoverable for future programs.</a:t>
+            </a:r>
+          </a:p>
+          <a:p>
+            <a:pPr lvl="1"/>
+            <a:r>
+              <a:t>Section 2: Department KPI performance. EMP062 contributes to ast emp062 01 through recurring collaboration, clear ownership boundaries, and measurable outcomes. The team captures decisions, open issues, and handoffs so that knowledge remains discoverable for future programs.</a:t>
+            </a:r>
+          </a:p>
+          <a:p>
+            <a:pPr lvl="1"/>
+            <a:r>
+              <a:t>Section 3: Department KPI performance. EMP062 contributes to ast emp062 01 through recurring collaboration, clear ownership boundaries, and measurable outcomes. The team captures decisions, open issues, and handoffs so that knowledge remains discoverable for future programs.</a:t>
             </a:r>
           </a:p>
         </p:txBody>
@@ -3312,7 +3342,7 @@
           <a:lstStyle/>
           <a:p>
             <a:r>
-              <a:t>Incident Response Metrics</a:t>
+              <a:t>Ast Emp062 01 - EMP062</a:t>
             </a:r>
           </a:p>
         </p:txBody>
@@ -3333,17 +3363,103 @@
           <a:lstStyle/>
           <a:p>
             <a:r>
-              <a:t>Overview of Incident Response Metrics for Operations department.</a:t>
-            </a:r>
-          </a:p>
-          <a:p>
-            <a:r>
-              <a:t>Responsible: Jordan Nguyen (Specialist)</a:t>
-            </a:r>
-          </a:p>
-          <a:p>
-            <a:r>
-              <a:t>Location: Bengaluru | Skills: SQL, Kusto, TypeScript, Power BI</a:t>
+              <a:t>Slide 4: Executive Summary</a:t>
+            </a:r>
+          </a:p>
+          <a:p>
+            <a:pPr lvl="1"/>
+            <a:r>
+              <a:t>Section 1: Automation backlog refinement. EMP062 contributes to ast emp062 01 through recurring collaboration, clear ownership boundaries, and measurable outcomes. The team captures decisions, open issues, and handoffs so that knowledge remains discoverable for future programs.</a:t>
+            </a:r>
+          </a:p>
+          <a:p>
+            <a:pPr lvl="1"/>
+            <a:r>
+              <a:t>Section 2: Department KPI performance. EMP062 contributes to ast emp062 01 through recurring collaboration, clear ownership boundaries, and measurable outcomes. The team captures decisions, open issues, and handoffs so that knowledge remains discoverable for future programs.</a:t>
+            </a:r>
+          </a:p>
+          <a:p>
+            <a:pPr lvl="1"/>
+            <a:r>
+              <a:t>Section 3: Data quality remediation. EMP062 contributes to ast emp062 01 through recurring collaboration, clear ownership boundaries, and measurable outcomes. The team captures decisions, open issues, and handoffs so that knowledge remains discoverable for future programs.</a:t>
+            </a:r>
+          </a:p>
+        </p:txBody>
+      </p:sp>
+    </p:spTree>
+  </p:cSld>
+  <p:clrMapOvr>
+    <a:masterClrMapping/>
+  </p:clrMapOvr>
+</p:sld>
+</file>
+
+<file path=ppt/slides/slide5.xml><?xml version="1.0" encoding="utf-8"?>
+<p:sld xmlns:a="http://schemas.openxmlformats.org/drawingml/2006/main" xmlns:p="http://schemas.openxmlformats.org/presentationml/2006/main" xmlns:r="http://schemas.openxmlformats.org/officeDocument/2006/relationships">
+  <p:cSld>
+    <p:spTree>
+      <p:nvGrpSpPr>
+        <p:cNvPr id="1" name=""/>
+        <p:cNvGrpSpPr/>
+        <p:nvPr/>
+      </p:nvGrpSpPr>
+      <p:grpSpPr/>
+      <p:sp>
+        <p:nvSpPr>
+          <p:cNvPr id="2" name="Title 1"/>
+          <p:cNvSpPr>
+            <a:spLocks noGrp="1"/>
+          </p:cNvSpPr>
+          <p:nvPr>
+            <p:ph type="title"/>
+          </p:nvPr>
+        </p:nvSpPr>
+        <p:spPr/>
+        <p:txBody>
+          <a:bodyPr/>
+          <a:lstStyle/>
+          <a:p>
+            <a:r>
+              <a:t>Ast Emp062 01 - EMP062</a:t>
+            </a:r>
+          </a:p>
+        </p:txBody>
+      </p:sp>
+      <p:sp>
+        <p:nvSpPr>
+          <p:cNvPr id="3" name="Content Placeholder 2"/>
+          <p:cNvSpPr>
+            <a:spLocks noGrp="1"/>
+          </p:cNvSpPr>
+          <p:nvPr>
+            <p:ph idx="1"/>
+          </p:nvPr>
+        </p:nvSpPr>
+        <p:spPr/>
+        <p:txBody>
+          <a:bodyPr/>
+          <a:lstStyle/>
+          <a:p>
+            <a:r>
+              <a:t>Slide 5: Executive Summary</a:t>
+            </a:r>
+          </a:p>
+          <a:p>
+            <a:pPr lvl="1"/>
+            <a:r>
+              <a:t>Section 1: Quarterly delivery milestones. EMP062 contributes to ast emp062 01 through recurring collaboration, clear ownership boundaries, and measurable outcomes. The team captures decisions, open issues, and handoffs so that knowledge remains discoverable for future programs.</a:t>
+            </a:r>
+          </a:p>
+          <a:p>
+            <a:pPr lvl="1"/>
+            <a:r>
+              <a:t>Section 2: Data quality remediation. EMP062 contributes to ast emp062 01 through recurring collaboration, clear ownership boundaries, and measurable outcomes. The team captures decisions, open issues, and handoffs so that knowledge remains discoverable for future programs.</a:t>
+            </a:r>
+          </a:p>
+          <a:p>
+            <a:pPr lvl="1"/>
+            <a:r>
+              <a:t>Section 3: Quarterly delivery milestones. EMP062 contributes to ast emp062 01 through recurring collaboration, clear ownership boundaries, and measurable outcomes. The team captures decisions, open issues, and handoffs so that knowledge remains discoverable for future programs.</a:t>
             </a:r>
           </a:p>
         </p:txBody>
